--- a/docs/DeployFlow_Final_Presentation.pptx
+++ b/docs/DeployFlow_Final_Presentation.pptx
@@ -7782,7 +7782,7 @@
         <p:spPr>
           <a:xfrm>
             <a:off x="640080" y="1143000"/>
-            <a:ext cx="5486400" cy="6858000"/>
+            <a:ext cx="5486400" cy="4572000"/>
           </a:xfrm>
           <a:prstGeom prst="rect">
             <a:avLst/>
